--- a/AI for Engineers Course/Week 2/Week2_Slides_AI_APIs_SDKs.pptx
+++ b/AI for Engineers Course/Week 2/Week2_Slides_AI_APIs_SDKs.pptx
@@ -4464,6 +4464,10 @@
           </a:solidFill>
           <a:ln/>
         </p:spPr>
+        <p:txBody>
+          <a:bodyPr/>
+          <a:p/>
+        </p:txBody>
       </p:sp>
       <p:sp>
         <p:nvSpPr>
@@ -4579,7 +4583,7 @@
                 <a:ea typeface="Calibri" pitchFamily="34" charset="-122"/>
                 <a:cs typeface="Calibri" pitchFamily="34" charset="-120"/>
               </a:rPr>
-              <a:t>Constitution AI: trained with safety principles</a:t>
+              <a:t>Constitutional AI: trained with safety principles</a:t>
             </a:r>
             <a:endParaRPr lang="en-US" sz="1800" dirty="0"/>
           </a:p>
@@ -4699,7 +4703,7 @@
                 <a:ea typeface="Calibri" pitchFamily="34" charset="-122"/>
                 <a:cs typeface="Calibri" pitchFamily="34" charset="-120"/>
               </a:rPr>
-              <a:t>Tokens: 100K context window (Claude 3), 200K coming</a:t>
+              <a:t>Tokens: 200K context window (Claude 3 launched at 200K)</a:t>
             </a:r>
             <a:endParaRPr lang="en-US" sz="1800" dirty="0"/>
           </a:p>
@@ -4795,6 +4799,10 @@
           </a:solidFill>
           <a:ln/>
         </p:spPr>
+        <p:txBody>
+          <a:bodyPr/>
+          <a:p/>
+        </p:txBody>
       </p:sp>
       <p:sp>
         <p:nvSpPr>
@@ -5126,6 +5134,10 @@
           </a:solidFill>
           <a:ln/>
         </p:spPr>
+        <p:txBody>
+          <a:bodyPr/>
+          <a:p/>
+        </p:txBody>
       </p:sp>
       <p:sp>
         <p:nvSpPr>
@@ -5457,6 +5469,10 @@
           </a:solidFill>
           <a:ln/>
         </p:spPr>
+        <p:txBody>
+          <a:bodyPr/>
+          <a:p/>
+        </p:txBody>
       </p:sp>
       <p:sp>
         <p:nvSpPr>
@@ -5788,6 +5804,10 @@
           </a:solidFill>
           <a:ln/>
         </p:spPr>
+        <p:txBody>
+          <a:bodyPr/>
+          <a:p/>
+        </p:txBody>
       </p:sp>
       <p:sp>
         <p:nvSpPr>
@@ -6119,6 +6139,10 @@
           </a:solidFill>
           <a:ln/>
         </p:spPr>
+        <p:txBody>
+          <a:bodyPr/>
+          <a:p/>
+        </p:txBody>
       </p:sp>
       <p:sp>
         <p:nvSpPr>
@@ -6450,6 +6474,10 @@
           </a:solidFill>
           <a:ln/>
         </p:spPr>
+        <p:txBody>
+          <a:bodyPr/>
+          <a:p/>
+        </p:txBody>
       </p:sp>
       <p:sp>
         <p:nvSpPr>
@@ -6781,6 +6809,10 @@
           </a:solidFill>
           <a:ln/>
         </p:spPr>
+        <p:txBody>
+          <a:bodyPr/>
+          <a:p/>
+        </p:txBody>
       </p:sp>
       <p:sp>
         <p:nvSpPr>
@@ -7112,6 +7144,10 @@
           </a:solidFill>
           <a:ln/>
         </p:spPr>
+        <p:txBody>
+          <a:bodyPr/>
+          <a:p/>
+        </p:txBody>
       </p:sp>
       <p:sp>
         <p:nvSpPr>
@@ -7443,6 +7479,10 @@
           </a:solidFill>
           <a:ln/>
         </p:spPr>
+        <p:txBody>
+          <a:bodyPr/>
+          <a:p/>
+        </p:txBody>
       </p:sp>
       <p:sp>
         <p:nvSpPr>
@@ -7774,6 +7814,10 @@
           </a:solidFill>
           <a:ln/>
         </p:spPr>
+        <p:txBody>
+          <a:bodyPr/>
+          <a:p/>
+        </p:txBody>
       </p:sp>
       <p:sp>
         <p:nvSpPr>
@@ -8105,6 +8149,10 @@
           </a:solidFill>
           <a:ln/>
         </p:spPr>
+        <p:txBody>
+          <a:bodyPr/>
+          <a:p/>
+        </p:txBody>
       </p:sp>
       <p:sp>
         <p:nvSpPr>
@@ -8436,6 +8484,10 @@
           </a:solidFill>
           <a:ln/>
         </p:spPr>
+        <p:txBody>
+          <a:bodyPr/>
+          <a:p/>
+        </p:txBody>
       </p:sp>
       <p:sp>
         <p:nvSpPr>
@@ -8767,6 +8819,10 @@
           </a:solidFill>
           <a:ln/>
         </p:spPr>
+        <p:txBody>
+          <a:bodyPr/>
+          <a:p/>
+        </p:txBody>
       </p:sp>
       <p:sp>
         <p:nvSpPr>
@@ -9098,6 +9154,10 @@
           </a:solidFill>
           <a:ln/>
         </p:spPr>
+        <p:txBody>
+          <a:bodyPr/>
+          <a:p/>
+        </p:txBody>
       </p:sp>
       <p:sp>
         <p:nvSpPr>
@@ -9429,6 +9489,10 @@
           </a:solidFill>
           <a:ln/>
         </p:spPr>
+        <p:txBody>
+          <a:bodyPr/>
+          <a:p/>
+        </p:txBody>
       </p:sp>
       <p:sp>
         <p:nvSpPr>
@@ -9760,6 +9824,10 @@
           </a:solidFill>
           <a:ln/>
         </p:spPr>
+        <p:txBody>
+          <a:bodyPr/>
+          <a:p/>
+        </p:txBody>
       </p:sp>
       <p:sp>
         <p:nvSpPr>
@@ -10091,6 +10159,10 @@
           </a:solidFill>
           <a:ln/>
         </p:spPr>
+        <p:txBody>
+          <a:bodyPr/>
+          <a:p/>
+        </p:txBody>
       </p:sp>
       <p:sp>
         <p:nvSpPr>
@@ -10422,6 +10494,10 @@
           </a:solidFill>
           <a:ln/>
         </p:spPr>
+        <p:txBody>
+          <a:bodyPr/>
+          <a:p/>
+        </p:txBody>
       </p:sp>
       <p:sp>
         <p:nvSpPr>
@@ -10753,6 +10829,10 @@
           </a:solidFill>
           <a:ln/>
         </p:spPr>
+        <p:txBody>
+          <a:bodyPr/>
+          <a:p/>
+        </p:txBody>
       </p:sp>
       <p:sp>
         <p:nvSpPr>
@@ -11084,6 +11164,10 @@
           </a:solidFill>
           <a:ln/>
         </p:spPr>
+        <p:txBody>
+          <a:bodyPr/>
+          <a:p/>
+        </p:txBody>
       </p:sp>
       <p:sp>
         <p:nvSpPr>
@@ -11390,7 +11474,7 @@
                 <a:ea typeface="Georgia" pitchFamily="34" charset="-122"/>
                 <a:cs typeface="Georgia" pitchFamily="34" charset="-120"/>
               </a:rPr>
-              <a:t>AI API Landscape 2025</a:t>
+              <a:t>AI API Landscape 2026</a:t>
             </a:r>
             <a:endParaRPr lang="en-US" sz="4000" dirty="0"/>
           </a:p>
@@ -11415,6 +11499,10 @@
           </a:solidFill>
           <a:ln/>
         </p:spPr>
+        <p:txBody>
+          <a:bodyPr/>
+          <a:p/>
+        </p:txBody>
       </p:sp>
       <p:sp>
         <p:nvSpPr>
@@ -11530,7 +11618,7 @@
                 <a:ea typeface="Calibri" pitchFamily="34" charset="-122"/>
                 <a:cs typeface="Calibri" pitchFamily="34" charset="-120"/>
               </a:rPr>
-              <a:t>Google: Gemini (multimodal), PaLM 2</a:t>
+              <a:t>Google: Gemini (multimodal), Gemini</a:t>
             </a:r>
             <a:endParaRPr lang="en-US" sz="1800" dirty="0"/>
           </a:p>
@@ -11746,6 +11834,10 @@
           </a:solidFill>
           <a:ln/>
         </p:spPr>
+        <p:txBody>
+          <a:bodyPr/>
+          <a:p/>
+        </p:txBody>
       </p:sp>
       <p:sp>
         <p:nvSpPr>
@@ -12037,6 +12129,10 @@
           </a:solidFill>
           <a:ln/>
         </p:spPr>
+        <p:txBody>
+          <a:bodyPr/>
+          <a:p/>
+        </p:txBody>
       </p:sp>
       <p:sp>
         <p:nvSpPr>
@@ -12328,6 +12424,10 @@
           </a:solidFill>
           <a:ln/>
         </p:spPr>
+        <p:txBody>
+          <a:bodyPr/>
+          <a:p/>
+        </p:txBody>
       </p:sp>
       <p:sp>
         <p:nvSpPr>
@@ -12619,6 +12719,10 @@
           </a:solidFill>
           <a:ln/>
         </p:spPr>
+        <p:txBody>
+          <a:bodyPr/>
+          <a:p/>
+        </p:txBody>
       </p:sp>
       <p:sp>
         <p:nvSpPr>
@@ -12910,6 +13014,10 @@
           </a:solidFill>
           <a:ln/>
         </p:spPr>
+        <p:txBody>
+          <a:bodyPr/>
+          <a:p/>
+        </p:txBody>
       </p:sp>
       <p:sp>
         <p:nvSpPr>
@@ -13201,6 +13309,10 @@
           </a:solidFill>
           <a:ln/>
         </p:spPr>
+        <p:txBody>
+          <a:bodyPr/>
+          <a:p/>
+        </p:txBody>
       </p:sp>
       <p:sp>
         <p:nvSpPr>
@@ -13492,6 +13604,10 @@
           </a:solidFill>
           <a:ln/>
         </p:spPr>
+        <p:txBody>
+          <a:bodyPr/>
+          <a:p/>
+        </p:txBody>
       </p:sp>
       <p:sp>
         <p:nvSpPr>
@@ -13783,6 +13899,10 @@
           </a:solidFill>
           <a:ln/>
         </p:spPr>
+        <p:txBody>
+          <a:bodyPr/>
+          <a:p/>
+        </p:txBody>
       </p:sp>
       <p:sp>
         <p:nvSpPr>
@@ -14074,6 +14194,10 @@
           </a:solidFill>
           <a:ln/>
         </p:spPr>
+        <p:txBody>
+          <a:bodyPr/>
+          <a:p/>
+        </p:txBody>
       </p:sp>
       <p:sp>
         <p:nvSpPr>
@@ -14514,6 +14638,10 @@
           </a:solidFill>
           <a:ln/>
         </p:spPr>
+        <p:txBody>
+          <a:bodyPr/>
+          <a:p/>
+        </p:txBody>
       </p:sp>
       <p:sp>
         <p:nvSpPr>
@@ -14845,6 +14973,10 @@
           </a:solidFill>
           <a:ln/>
         </p:spPr>
+        <p:txBody>
+          <a:bodyPr/>
+          <a:p/>
+        </p:txBody>
       </p:sp>
       <p:sp>
         <p:nvSpPr>
@@ -15216,6 +15348,10 @@
           </a:solidFill>
           <a:ln/>
         </p:spPr>
+        <p:txBody>
+          <a:bodyPr/>
+          <a:p/>
+        </p:txBody>
       </p:sp>
       <p:sp>
         <p:nvSpPr>
@@ -15547,6 +15683,10 @@
           </a:solidFill>
           <a:ln/>
         </p:spPr>
+        <p:txBody>
+          <a:bodyPr/>
+          <a:p/>
+        </p:txBody>
       </p:sp>
       <p:sp>
         <p:nvSpPr>
@@ -15662,7 +15802,7 @@
                 <a:ea typeface="Calibri" pitchFamily="34" charset="-122"/>
                 <a:cs typeface="Calibri" pitchFamily="34" charset="-120"/>
               </a:rPr>
-              <a:t>text-embedding-3-small: fast, 512 dimensions</a:t>
+              <a:t>text-embedding-3-small: fast, 1536 dimensions</a:t>
             </a:r>
             <a:endParaRPr lang="en-US" sz="1800" dirty="0"/>
           </a:p>
@@ -15878,6 +16018,10 @@
           </a:solidFill>
           <a:ln/>
         </p:spPr>
+        <p:txBody>
+          <a:bodyPr/>
+          <a:p/>
+        </p:txBody>
       </p:sp>
       <p:sp>
         <p:nvSpPr>
@@ -16209,6 +16353,10 @@
           </a:solidFill>
           <a:ln/>
         </p:spPr>
+        <p:txBody>
+          <a:bodyPr/>
+          <a:p/>
+        </p:txBody>
       </p:sp>
       <p:sp>
         <p:nvSpPr>
